--- a/lectures-and-labs/week05/mcp-lecture.pptx
+++ b/lectures-and-labs/week05/mcp-lecture.pptx
@@ -24620,7 +24620,7 @@
               <a:t>matching</a:t>
             </a:r>
             <a:r>
-              <a:t>: the user's words against the descriptions</a:t>
+              <a:t>: the user's words against the names and descriptions</a:t>
             </a:r>
           </a:p>
           <a:p>
@@ -38962,7 +38962,7 @@
           <a:p>
             <a:pPr/>
             <a:r>
-              <a:t>A terse description, then wondering why the tool is never called</a:t>
+              <a:t>A name and description that say nothing, then wondering why another tool is called</a:t>
             </a:r>
           </a:p>
           <a:p>
